--- a/docs/AiAssistant/AiAssistant-team-intro.pptx
+++ b/docs/AiAssistant/AiAssistant-team-intro.pptx
@@ -1392,7 +1392,7 @@
           <a:p>
             <a:r>
               <a:rPr lang="en-US" dirty="0"/>
-              <a:t>Toàn bộ độ phức tạp về cơ cấu tài liệu nằm ở đây — con người không phải nhớ. AGENTS.md là chuẩn mở trung lập; ta đang chuyển Cursor → Claude Code và có thể còn đổi tiếp, nên quy tắc phải sống lâu hơn công cụ. Quy ước nằm trong repo nên tự áp dụng cho mọi người, không phụ thuộc ai dự buổi chia sẻ nào.</a:t>
+              <a:t>Chuỗi nạp: con trỏ của tool (CLAUDE.md / .cursor/rules) → AGENTS.md của dự án → adapter AGENTS-SystemDesign.md (chỉ 3 hành vi luôn trực chiến: trigger vào vùng docs, đề nghị ghi quyết định, chốt an toàn agreed-customer) → luật vùng docs/SystemDesign/AGENTS.md, nạp khi cần. Bộ của ta là 2 file cuối, gắn vào AGENTS.md có sẵn của dự án bằng 1 dòng link — không trộn nội dung, nâng cấp chỉ copy đè. Quy ước nằm trong repo nên tự áp dụng cho mọi người, không phụ thuộc ai dự buổi chia sẻ nào.</a:t>
             </a:r>
             <a:endParaRPr lang="en-US" dirty="0"/>
           </a:p>
@@ -9003,7 +9003,7 @@
                 <a:ea typeface="Calibri" pitchFamily="34" charset="-122"/>
                 <a:cs typeface="Calibri" pitchFamily="34" charset="-120"/>
               </a:rPr>
-              <a:t>AGENTS.MD</a:t>
+              <a:t>INSTRUCTION FILE</a:t>
             </a:r>
             <a:endParaRPr lang="en-US" sz="1200" dirty="0"/>
           </a:p>
@@ -9056,119 +9056,12 @@
         </p:nvSpPr>
         <p:spPr>
           <a:xfrm>
-            <a:off x="1051560" y="1920240"/>
-            <a:ext cx="3108960" cy="1143000"/>
+            <a:off x="548640" y="1737360"/>
+            <a:ext cx="2194560" cy="502920"/>
           </a:xfrm>
           <a:prstGeom prst="roundRect">
             <a:avLst>
-              <a:gd name="adj" fmla="val 6400"/>
-            </a:avLst>
-          </a:prstGeom>
-          <a:solidFill>
-            <a:srgbClr val="1E2761"/>
-          </a:solidFill>
-          <a:ln/>
-          <a:effectLst>
-            <a:outerShdw sx="100000" sy="100000" kx="0" ky="0" algn="bl" rotWithShape="0" blurRad="88900" dist="25400" dir="5400000">
-              <a:srgbClr val="1E2761">
-                <a:alpha val="22000"/>
-              </a:srgbClr>
-            </a:outerShdw>
-          </a:effectLst>
-        </p:spPr>
-      </p:sp>
-      <p:sp>
-        <p:nvSpPr>
-          <p:cNvPr id="5" name="Text 3"/>
-          <p:cNvSpPr/>
-          <p:nvPr/>
-        </p:nvSpPr>
-        <p:spPr>
-          <a:xfrm>
-            <a:off x="1051560" y="2084832"/>
-            <a:ext cx="3108960" cy="457200"/>
-          </a:xfrm>
-          <a:prstGeom prst="rect">
-            <a:avLst/>
-          </a:prstGeom>
-          <a:noFill/>
-          <a:ln/>
-        </p:spPr>
-        <p:txBody>
-          <a:bodyPr wrap="square" lIns="0" tIns="0" rIns="0" bIns="0" rtlCol="0" anchor="ctr"/>
-          <a:lstStyle/>
-          <a:p>
-            <a:pPr algn="ctr" indent="0" marL="0">
-              <a:buNone/>
-            </a:pPr>
-            <a:r>
-              <a:rPr lang="en-US" sz="1700" b="1" dirty="0">
-                <a:solidFill>
-                  <a:srgbClr val="FFFFFF"/>
-                </a:solidFill>
-                <a:latin typeface="Courier New" pitchFamily="34" charset="0"/>
-                <a:ea typeface="Courier New" pitchFamily="34" charset="-122"/>
-                <a:cs typeface="Courier New" pitchFamily="34" charset="-120"/>
-              </a:rPr>
-              <a:t>AGENTS.md</a:t>
-            </a:r>
-            <a:endParaRPr lang="en-US" sz="1700" dirty="0"/>
-          </a:p>
-        </p:txBody>
-      </p:sp>
-      <p:sp>
-        <p:nvSpPr>
-          <p:cNvPr id="6" name="Text 4"/>
-          <p:cNvSpPr/>
-          <p:nvPr/>
-        </p:nvSpPr>
-        <p:spPr>
-          <a:xfrm>
-            <a:off x="1051560" y="2542032"/>
-            <a:ext cx="3108960" cy="365760"/>
-          </a:xfrm>
-          <a:prstGeom prst="rect">
-            <a:avLst/>
-          </a:prstGeom>
-          <a:noFill/>
-          <a:ln/>
-        </p:spPr>
-        <p:txBody>
-          <a:bodyPr wrap="square" lIns="0" tIns="0" rIns="0" bIns="0" rtlCol="0" anchor="ctr"/>
-          <a:lstStyle/>
-          <a:p>
-            <a:pPr algn="ctr" indent="0" marL="0">
-              <a:buNone/>
-            </a:pPr>
-            <a:r>
-              <a:rPr lang="en-US" sz="1150" dirty="0">
-                <a:solidFill>
-                  <a:srgbClr val="CADCFC"/>
-                </a:solidFill>
-                <a:latin typeface="Calibri" pitchFamily="34" charset="0"/>
-                <a:ea typeface="Calibri" pitchFamily="34" charset="-122"/>
-                <a:cs typeface="Calibri" pitchFamily="34" charset="-120"/>
-              </a:rPr>
-              <a:t>file gốc duy nhất</a:t>
-            </a:r>
-            <a:endParaRPr lang="en-US" sz="1150" dirty="0"/>
-          </a:p>
-        </p:txBody>
-      </p:sp>
-      <p:sp>
-        <p:nvSpPr>
-          <p:cNvPr id="7" name="Shape 5"/>
-          <p:cNvSpPr/>
-          <p:nvPr/>
-        </p:nvSpPr>
-        <p:spPr>
-          <a:xfrm>
-            <a:off x="548640" y="3977640"/>
-            <a:ext cx="2011680" cy="685800"/>
-          </a:xfrm>
-          <a:prstGeom prst="roundRect">
-            <a:avLst>
-              <a:gd name="adj" fmla="val 9333"/>
+              <a:gd name="adj" fmla="val 12727"/>
             </a:avLst>
           </a:prstGeom>
           <a:solidFill>
@@ -9184,14 +9077,14 @@
       </p:sp>
       <p:sp>
         <p:nvSpPr>
-          <p:cNvPr id="8" name="Text 6"/>
-          <p:cNvSpPr/>
-          <p:nvPr/>
-        </p:nvSpPr>
-        <p:spPr>
-          <a:xfrm>
-            <a:off x="548640" y="3977640"/>
-            <a:ext cx="2011680" cy="685800"/>
+          <p:cNvPr id="5" name="Text 3"/>
+          <p:cNvSpPr/>
+          <p:nvPr/>
+        </p:nvSpPr>
+        <p:spPr>
+          <a:xfrm>
+            <a:off x="548640" y="1737360"/>
+            <a:ext cx="2194560" cy="502920"/>
           </a:xfrm>
           <a:prstGeom prst="rect">
             <a:avLst/>
@@ -9207,7 +9100,7 @@
               <a:buNone/>
             </a:pPr>
             <a:r>
-              <a:rPr lang="en-US" sz="1250" dirty="0">
+              <a:rPr lang="en-US" sz="1150" dirty="0">
                 <a:solidFill>
                   <a:srgbClr val="1E2761"/>
                 </a:solidFill>
@@ -9215,50 +9108,26 @@
                 <a:ea typeface="Courier New" pitchFamily="34" charset="-122"/>
                 <a:cs typeface="Courier New" pitchFamily="34" charset="-120"/>
               </a:rPr>
-              <a:t>CLAUDE.md  →</a:t>
-            </a:r>
-            <a:endParaRPr lang="en-US" sz="1250" dirty="0"/>
-          </a:p>
-        </p:txBody>
-      </p:sp>
-      <p:sp>
-        <p:nvSpPr>
-          <p:cNvPr id="9" name="Shape 7"/>
-          <p:cNvSpPr/>
-          <p:nvPr/>
-        </p:nvSpPr>
-        <p:spPr>
-          <a:xfrm flipV="1">
-            <a:off x="1554480" y="3063240"/>
-            <a:ext cx="1051560" cy="914400"/>
-          </a:xfrm>
-          <a:prstGeom prst="line">
-            <a:avLst/>
-          </a:prstGeom>
-          <a:noFill/>
-          <a:ln w="19050">
-            <a:solidFill>
-              <a:srgbClr val="5A6178"/>
-            </a:solidFill>
-            <a:prstDash val="solid"/>
-            <a:tailEnd type="arrow"/>
-          </a:ln>
-        </p:spPr>
-      </p:sp>
-      <p:sp>
-        <p:nvSpPr>
-          <p:cNvPr id="10" name="Shape 8"/>
-          <p:cNvSpPr/>
-          <p:nvPr/>
-        </p:nvSpPr>
-        <p:spPr>
-          <a:xfrm>
-            <a:off x="2697480" y="3977640"/>
-            <a:ext cx="2011680" cy="685800"/>
+              <a:t>CLAUDE.md</a:t>
+            </a:r>
+            <a:endParaRPr lang="en-US" sz="1150" dirty="0"/>
+          </a:p>
+        </p:txBody>
+      </p:sp>
+      <p:sp>
+        <p:nvSpPr>
+          <p:cNvPr id="6" name="Shape 4"/>
+          <p:cNvSpPr/>
+          <p:nvPr/>
+        </p:nvSpPr>
+        <p:spPr>
+          <a:xfrm>
+            <a:off x="2834640" y="1737360"/>
+            <a:ext cx="2194560" cy="502920"/>
           </a:xfrm>
           <a:prstGeom prst="roundRect">
             <a:avLst>
-              <a:gd name="adj" fmla="val 9333"/>
+              <a:gd name="adj" fmla="val 12727"/>
             </a:avLst>
           </a:prstGeom>
           <a:solidFill>
@@ -9274,14 +9143,14 @@
       </p:sp>
       <p:sp>
         <p:nvSpPr>
-          <p:cNvPr id="11" name="Text 9"/>
-          <p:cNvSpPr/>
-          <p:nvPr/>
-        </p:nvSpPr>
-        <p:spPr>
-          <a:xfrm>
-            <a:off x="2697480" y="3977640"/>
-            <a:ext cx="2011680" cy="685800"/>
+          <p:cNvPr id="7" name="Text 5"/>
+          <p:cNvSpPr/>
+          <p:nvPr/>
+        </p:nvSpPr>
+        <p:spPr>
+          <a:xfrm>
+            <a:off x="2834640" y="1737360"/>
+            <a:ext cx="2194560" cy="502920"/>
           </a:xfrm>
           <a:prstGeom prst="rect">
             <a:avLst/>
@@ -9297,7 +9166,7 @@
               <a:buNone/>
             </a:pPr>
             <a:r>
-              <a:rPr lang="en-US" sz="1250" dirty="0">
+              <a:rPr lang="en-US" sz="1150" dirty="0">
                 <a:solidFill>
                   <a:srgbClr val="1E2761"/>
                 </a:solidFill>
@@ -9305,22 +9174,22 @@
                 <a:ea typeface="Courier New" pitchFamily="34" charset="-122"/>
                 <a:cs typeface="Courier New" pitchFamily="34" charset="-120"/>
               </a:rPr>
-              <a:t>.cursor/rules  →</a:t>
-            </a:r>
-            <a:endParaRPr lang="en-US" sz="1250" dirty="0"/>
-          </a:p>
-        </p:txBody>
-      </p:sp>
-      <p:sp>
-        <p:nvSpPr>
-          <p:cNvPr id="12" name="Shape 10"/>
-          <p:cNvSpPr/>
-          <p:nvPr/>
-        </p:nvSpPr>
-        <p:spPr>
-          <a:xfrm flipV="1">
-            <a:off x="3703320" y="3063240"/>
-            <a:ext cx="45720" cy="914400"/>
+              <a:t>.cursor/rules</a:t>
+            </a:r>
+            <a:endParaRPr lang="en-US" sz="1150" dirty="0"/>
+          </a:p>
+        </p:txBody>
+      </p:sp>
+      <p:sp>
+        <p:nvSpPr>
+          <p:cNvPr id="8" name="Shape 6"/>
+          <p:cNvSpPr/>
+          <p:nvPr/>
+        </p:nvSpPr>
+        <p:spPr>
+          <a:xfrm>
+            <a:off x="2788920" y="2240280"/>
+            <a:ext cx="0" cy="256032"/>
           </a:xfrm>
           <a:prstGeom prst="line">
             <a:avLst/>
@@ -9337,14 +9206,43 @@
       </p:sp>
       <p:sp>
         <p:nvSpPr>
-          <p:cNvPr id="13" name="Text 11"/>
-          <p:cNvSpPr/>
-          <p:nvPr/>
-        </p:nvSpPr>
-        <p:spPr>
-          <a:xfrm>
-            <a:off x="548640" y="4892040"/>
-            <a:ext cx="4297680" cy="1188720"/>
+          <p:cNvPr id="9" name="Shape 7"/>
+          <p:cNvSpPr/>
+          <p:nvPr/>
+        </p:nvSpPr>
+        <p:spPr>
+          <a:xfrm>
+            <a:off x="548640" y="2496312"/>
+            <a:ext cx="4480560" cy="841248"/>
+          </a:xfrm>
+          <a:prstGeom prst="roundRect">
+            <a:avLst>
+              <a:gd name="adj" fmla="val 8696"/>
+            </a:avLst>
+          </a:prstGeom>
+          <a:solidFill>
+            <a:srgbClr val="CADCFC"/>
+          </a:solidFill>
+          <a:ln/>
+          <a:effectLst>
+            <a:outerShdw sx="100000" sy="100000" kx="0" ky="0" algn="bl" rotWithShape="0" blurRad="88900" dist="25400" dir="5400000">
+              <a:srgbClr val="1E2761">
+                <a:alpha val="22000"/>
+              </a:srgbClr>
+            </a:outerShdw>
+          </a:effectLst>
+        </p:spPr>
+      </p:sp>
+      <p:sp>
+        <p:nvSpPr>
+          <p:cNvPr id="10" name="Text 8"/>
+          <p:cNvSpPr/>
+          <p:nvPr/>
+        </p:nvSpPr>
+        <p:spPr>
+          <a:xfrm>
+            <a:off x="548640" y="2606040"/>
+            <a:ext cx="4480560" cy="384048"/>
           </a:xfrm>
           <a:prstGeom prst="rect">
             <a:avLst/>
@@ -9356,14 +9254,354 @@
           <a:bodyPr wrap="square" lIns="0" tIns="0" rIns="0" bIns="0" rtlCol="0" anchor="ctr"/>
           <a:lstStyle/>
           <a:p>
+            <a:pPr algn="ctr" indent="0" marL="0">
+              <a:buNone/>
+            </a:pPr>
+            <a:r>
+              <a:rPr lang="en-US" sz="1300" b="1" dirty="0">
+                <a:solidFill>
+                  <a:srgbClr val="1E2761"/>
+                </a:solidFill>
+                <a:latin typeface="Courier New" pitchFamily="34" charset="0"/>
+                <a:ea typeface="Courier New" pitchFamily="34" charset="-122"/>
+                <a:cs typeface="Courier New" pitchFamily="34" charset="-120"/>
+              </a:rPr>
+              <a:t>AGENTS.md</a:t>
+            </a:r>
+            <a:endParaRPr lang="en-US" sz="1300" dirty="0"/>
+          </a:p>
+        </p:txBody>
+      </p:sp>
+      <p:sp>
+        <p:nvSpPr>
+          <p:cNvPr id="11" name="Text 9"/>
+          <p:cNvSpPr/>
+          <p:nvPr/>
+        </p:nvSpPr>
+        <p:spPr>
+          <a:xfrm>
+            <a:off x="548640" y="2980944"/>
+            <a:ext cx="4480560" cy="310896"/>
+          </a:xfrm>
+          <a:prstGeom prst="rect">
+            <a:avLst/>
+          </a:prstGeom>
+          <a:noFill/>
+          <a:ln/>
+        </p:spPr>
+        <p:txBody>
+          <a:bodyPr wrap="square" lIns="0" tIns="0" rIns="0" bIns="0" rtlCol="0" anchor="ctr"/>
+          <a:lstStyle/>
+          <a:p>
+            <a:pPr algn="ctr" indent="0" marL="0">
+              <a:buNone/>
+            </a:pPr>
+            <a:r>
+              <a:rPr lang="en-US" sz="1050" dirty="0">
+                <a:solidFill>
+                  <a:srgbClr val="1E2761"/>
+                </a:solidFill>
+                <a:latin typeface="Calibri" pitchFamily="34" charset="0"/>
+                <a:ea typeface="Calibri" pitchFamily="34" charset="-122"/>
+                <a:cs typeface="Calibri" pitchFamily="34" charset="-120"/>
+              </a:rPr>
+              <a:t>file gốc CỦA DỰ ÁN — luật riêng + 1 dòng link</a:t>
+            </a:r>
+            <a:endParaRPr lang="en-US" sz="1050" dirty="0"/>
+          </a:p>
+        </p:txBody>
+      </p:sp>
+      <p:sp>
+        <p:nvSpPr>
+          <p:cNvPr id="12" name="Shape 10"/>
+          <p:cNvSpPr/>
+          <p:nvPr/>
+        </p:nvSpPr>
+        <p:spPr>
+          <a:xfrm>
+            <a:off x="2788920" y="3337560"/>
+            <a:ext cx="0" cy="237744"/>
+          </a:xfrm>
+          <a:prstGeom prst="line">
+            <a:avLst/>
+          </a:prstGeom>
+          <a:noFill/>
+          <a:ln w="19050">
+            <a:solidFill>
+              <a:srgbClr val="5A6178"/>
+            </a:solidFill>
+            <a:prstDash val="solid"/>
+            <a:tailEnd type="arrow"/>
+          </a:ln>
+        </p:spPr>
+      </p:sp>
+      <p:sp>
+        <p:nvSpPr>
+          <p:cNvPr id="13" name="Shape 11"/>
+          <p:cNvSpPr/>
+          <p:nvPr/>
+        </p:nvSpPr>
+        <p:spPr>
+          <a:xfrm>
+            <a:off x="548640" y="3575304"/>
+            <a:ext cx="4480560" cy="841248"/>
+          </a:xfrm>
+          <a:prstGeom prst="roundRect">
+            <a:avLst>
+              <a:gd name="adj" fmla="val 8696"/>
+            </a:avLst>
+          </a:prstGeom>
+          <a:solidFill>
+            <a:srgbClr val="02C39A"/>
+          </a:solidFill>
+          <a:ln/>
+          <a:effectLst>
+            <a:outerShdw sx="100000" sy="100000" kx="0" ky="0" algn="bl" rotWithShape="0" blurRad="88900" dist="25400" dir="5400000">
+              <a:srgbClr val="1E2761">
+                <a:alpha val="22000"/>
+              </a:srgbClr>
+            </a:outerShdw>
+          </a:effectLst>
+        </p:spPr>
+      </p:sp>
+      <p:sp>
+        <p:nvSpPr>
+          <p:cNvPr id="14" name="Text 12"/>
+          <p:cNvSpPr/>
+          <p:nvPr/>
+        </p:nvSpPr>
+        <p:spPr>
+          <a:xfrm>
+            <a:off x="548640" y="3685032"/>
+            <a:ext cx="4480560" cy="384048"/>
+          </a:xfrm>
+          <a:prstGeom prst="rect">
+            <a:avLst/>
+          </a:prstGeom>
+          <a:noFill/>
+          <a:ln/>
+        </p:spPr>
+        <p:txBody>
+          <a:bodyPr wrap="square" lIns="0" tIns="0" rIns="0" bIns="0" rtlCol="0" anchor="ctr"/>
+          <a:lstStyle/>
+          <a:p>
+            <a:pPr algn="ctr" indent="0" marL="0">
+              <a:buNone/>
+            </a:pPr>
+            <a:r>
+              <a:rPr lang="en-US" sz="1300" b="1" dirty="0">
+                <a:solidFill>
+                  <a:srgbClr val="1E2761"/>
+                </a:solidFill>
+                <a:latin typeface="Courier New" pitchFamily="34" charset="0"/>
+                <a:ea typeface="Courier New" pitchFamily="34" charset="-122"/>
+                <a:cs typeface="Courier New" pitchFamily="34" charset="-120"/>
+              </a:rPr>
+              <a:t>AGENTS-SystemDesign.md</a:t>
+            </a:r>
+            <a:endParaRPr lang="en-US" sz="1300" dirty="0"/>
+          </a:p>
+        </p:txBody>
+      </p:sp>
+      <p:sp>
+        <p:nvSpPr>
+          <p:cNvPr id="15" name="Text 13"/>
+          <p:cNvSpPr/>
+          <p:nvPr/>
+        </p:nvSpPr>
+        <p:spPr>
+          <a:xfrm>
+            <a:off x="548640" y="4059936"/>
+            <a:ext cx="4480560" cy="310896"/>
+          </a:xfrm>
+          <a:prstGeom prst="rect">
+            <a:avLst/>
+          </a:prstGeom>
+          <a:noFill/>
+          <a:ln/>
+        </p:spPr>
+        <p:txBody>
+          <a:bodyPr wrap="square" lIns="0" tIns="0" rIns="0" bIns="0" rtlCol="0" anchor="ctr"/>
+          <a:lstStyle/>
+          <a:p>
+            <a:pPr algn="ctr" indent="0" marL="0">
+              <a:buNone/>
+            </a:pPr>
+            <a:r>
+              <a:rPr lang="en-US" sz="1050" dirty="0">
+                <a:solidFill>
+                  <a:srgbClr val="1E2761"/>
+                </a:solidFill>
+                <a:latin typeface="Calibri" pitchFamily="34" charset="0"/>
+                <a:ea typeface="Calibri" pitchFamily="34" charset="-122"/>
+                <a:cs typeface="Calibri" pitchFamily="34" charset="-120"/>
+              </a:rPr>
+              <a:t>adapter — 3 hành vi luôn trực chiến</a:t>
+            </a:r>
+            <a:endParaRPr lang="en-US" sz="1050" dirty="0"/>
+          </a:p>
+        </p:txBody>
+      </p:sp>
+      <p:sp>
+        <p:nvSpPr>
+          <p:cNvPr id="16" name="Shape 14"/>
+          <p:cNvSpPr/>
+          <p:nvPr/>
+        </p:nvSpPr>
+        <p:spPr>
+          <a:xfrm>
+            <a:off x="2788920" y="4416552"/>
+            <a:ext cx="0" cy="237744"/>
+          </a:xfrm>
+          <a:prstGeom prst="line">
+            <a:avLst/>
+          </a:prstGeom>
+          <a:noFill/>
+          <a:ln w="19050">
+            <a:solidFill>
+              <a:srgbClr val="5A6178"/>
+            </a:solidFill>
+            <a:prstDash val="solid"/>
+            <a:tailEnd type="arrow"/>
+          </a:ln>
+        </p:spPr>
+      </p:sp>
+      <p:sp>
+        <p:nvSpPr>
+          <p:cNvPr id="17" name="Shape 15"/>
+          <p:cNvSpPr/>
+          <p:nvPr/>
+        </p:nvSpPr>
+        <p:spPr>
+          <a:xfrm>
+            <a:off x="548640" y="4654296"/>
+            <a:ext cx="4480560" cy="841248"/>
+          </a:xfrm>
+          <a:prstGeom prst="roundRect">
+            <a:avLst>
+              <a:gd name="adj" fmla="val 8696"/>
+            </a:avLst>
+          </a:prstGeom>
+          <a:solidFill>
+            <a:srgbClr val="1E2761"/>
+          </a:solidFill>
+          <a:ln/>
+          <a:effectLst>
+            <a:outerShdw sx="100000" sy="100000" kx="0" ky="0" algn="bl" rotWithShape="0" blurRad="88900" dist="25400" dir="5400000">
+              <a:srgbClr val="1E2761">
+                <a:alpha val="22000"/>
+              </a:srgbClr>
+            </a:outerShdw>
+          </a:effectLst>
+        </p:spPr>
+      </p:sp>
+      <p:sp>
+        <p:nvSpPr>
+          <p:cNvPr id="18" name="Text 16"/>
+          <p:cNvSpPr/>
+          <p:nvPr/>
+        </p:nvSpPr>
+        <p:spPr>
+          <a:xfrm>
+            <a:off x="548640" y="4764024"/>
+            <a:ext cx="4480560" cy="384048"/>
+          </a:xfrm>
+          <a:prstGeom prst="rect">
+            <a:avLst/>
+          </a:prstGeom>
+          <a:noFill/>
+          <a:ln/>
+        </p:spPr>
+        <p:txBody>
+          <a:bodyPr wrap="square" lIns="0" tIns="0" rIns="0" bIns="0" rtlCol="0" anchor="ctr"/>
+          <a:lstStyle/>
+          <a:p>
+            <a:pPr algn="ctr" indent="0" marL="0">
+              <a:buNone/>
+            </a:pPr>
+            <a:r>
+              <a:rPr lang="en-US" sz="1300" b="1" dirty="0">
+                <a:solidFill>
+                  <a:srgbClr val="FFFFFF"/>
+                </a:solidFill>
+                <a:latin typeface="Courier New" pitchFamily="34" charset="0"/>
+                <a:ea typeface="Courier New" pitchFamily="34" charset="-122"/>
+                <a:cs typeface="Courier New" pitchFamily="34" charset="-120"/>
+              </a:rPr>
+              <a:t>docs/SystemDesign/AGENTS.md</a:t>
+            </a:r>
+            <a:endParaRPr lang="en-US" sz="1300" dirty="0"/>
+          </a:p>
+        </p:txBody>
+      </p:sp>
+      <p:sp>
+        <p:nvSpPr>
+          <p:cNvPr id="19" name="Text 17"/>
+          <p:cNvSpPr/>
+          <p:nvPr/>
+        </p:nvSpPr>
+        <p:spPr>
+          <a:xfrm>
+            <a:off x="548640" y="5138928"/>
+            <a:ext cx="4480560" cy="310896"/>
+          </a:xfrm>
+          <a:prstGeom prst="rect">
+            <a:avLst/>
+          </a:prstGeom>
+          <a:noFill/>
+          <a:ln/>
+        </p:spPr>
+        <p:txBody>
+          <a:bodyPr wrap="square" lIns="0" tIns="0" rIns="0" bIns="0" rtlCol="0" anchor="ctr"/>
+          <a:lstStyle/>
+          <a:p>
+            <a:pPr algn="ctr" indent="0" marL="0">
+              <a:buNone/>
+            </a:pPr>
+            <a:r>
+              <a:rPr lang="en-US" sz="1050" dirty="0">
+                <a:solidFill>
+                  <a:srgbClr val="CADCFC"/>
+                </a:solidFill>
+                <a:latin typeface="Calibri" pitchFamily="34" charset="0"/>
+                <a:ea typeface="Calibri" pitchFamily="34" charset="-122"/>
+                <a:cs typeface="Calibri" pitchFamily="34" charset="-120"/>
+              </a:rPr>
+              <a:t>toàn bộ luật vùng tài liệu — nạp khi cần</a:t>
+            </a:r>
+            <a:endParaRPr lang="en-US" sz="1050" dirty="0"/>
+          </a:p>
+        </p:txBody>
+      </p:sp>
+      <p:sp>
+        <p:nvSpPr>
+          <p:cNvPr id="20" name="Text 18"/>
+          <p:cNvSpPr/>
+          <p:nvPr/>
+        </p:nvSpPr>
+        <p:spPr>
+          <a:xfrm>
+            <a:off x="548640" y="5632704"/>
+            <a:ext cx="4480560" cy="777240"/>
+          </a:xfrm>
+          <a:prstGeom prst="rect">
+            <a:avLst/>
+          </a:prstGeom>
+          <a:noFill/>
+          <a:ln/>
+        </p:spPr>
+        <p:txBody>
+          <a:bodyPr wrap="square" lIns="0" tIns="0" rIns="0" bIns="0" rtlCol="0" anchor="ctr"/>
+          <a:lstStyle/>
+          <a:p>
             <a:pPr indent="0" marL="0">
               <a:lnSpc>
-                <a:spcPct val="115000"/>
+                <a:spcPct val="112000"/>
               </a:lnSpc>
               <a:buNone/>
             </a:pPr>
             <a:r>
-              <a:rPr lang="en-US" sz="1200" i="1" dirty="0">
+              <a:rPr lang="en-US" sz="1150" i="1" dirty="0">
                 <a:solidFill>
                   <a:srgbClr val="5A6178"/>
                 </a:solidFill>
@@ -9371,55 +9609,15 @@
                 <a:ea typeface="Calibri" pitchFamily="34" charset="-122"/>
                 <a:cs typeface="Calibri" pitchFamily="34" charset="-120"/>
               </a:rPr>
-              <a:t>File của từng tool chỉ trỏ đến AGENTS.md.</a:t>
-            </a:r>
-            <a:endParaRPr lang="en-US" sz="1200" dirty="0"/>
-          </a:p>
-          <a:p>
-            <a:pPr indent="0" marL="0">
-              <a:lnSpc>
-                <a:spcPct val="115000"/>
-              </a:lnSpc>
-              <a:buNone/>
-            </a:pPr>
-            <a:r>
-              <a:rPr lang="en-US" sz="1200" i="1" dirty="0">
-                <a:solidFill>
-                  <a:srgbClr val="5A6178"/>
-                </a:solidFill>
-                <a:latin typeface="Calibri" pitchFamily="34" charset="0"/>
-                <a:ea typeface="Calibri" pitchFamily="34" charset="-122"/>
-                <a:cs typeface="Calibri" pitchFamily="34" charset="-120"/>
-              </a:rPr>
-              <a:t>Nội dung quy tắc sống lâu hơn lựa chọn công cụ</a:t>
-            </a:r>
-            <a:endParaRPr lang="en-US" sz="1200" dirty="0"/>
-          </a:p>
-          <a:p>
-            <a:pPr indent="0" marL="0">
-              <a:lnSpc>
-                <a:spcPct val="115000"/>
-              </a:lnSpc>
-              <a:buNone/>
-            </a:pPr>
-            <a:r>
-              <a:rPr lang="en-US" sz="1200" i="1" dirty="0">
-                <a:solidFill>
-                  <a:srgbClr val="5A6178"/>
-                </a:solidFill>
-                <a:latin typeface="Calibri" pitchFamily="34" charset="0"/>
-                <a:ea typeface="Calibri" pitchFamily="34" charset="-122"/>
-                <a:cs typeface="Calibri" pitchFamily="34" charset="-120"/>
-              </a:rPr>
-              <a:t>(Cursor → Claude Code → …)</a:t>
-            </a:r>
-            <a:endParaRPr lang="en-US" sz="1200" dirty="0"/>
-          </a:p>
-        </p:txBody>
-      </p:sp>
-      <p:sp>
-        <p:nvSpPr>
-          <p:cNvPr id="14" name="Text 12"/>
+              <a:t>Bộ quy tắc của ta = 2 file dưới cùng — nâng cấp chỉ copy đè, không đụng luật riêng của dự án. Nội dung quy tắc sống lâu hơn lựa chọn công cụ.</a:t>
+            </a:r>
+            <a:endParaRPr lang="en-US" sz="1150" dirty="0"/>
+          </a:p>
+        </p:txBody>
+      </p:sp>
+      <p:sp>
+        <p:nvSpPr>
+          <p:cNvPr id="21" name="Text 19"/>
           <p:cNvSpPr/>
           <p:nvPr/>
         </p:nvSpPr>
@@ -9458,7 +9656,7 @@
       </p:sp>
       <p:sp>
         <p:nvSpPr>
-          <p:cNvPr id="15" name="Text 13"/>
+          <p:cNvPr id="22" name="Text 20"/>
           <p:cNvSpPr/>
           <p:nvPr/>
         </p:nvSpPr>
@@ -9624,7 +9822,7 @@
       </p:sp>
       <p:sp>
         <p:nvSpPr>
-          <p:cNvPr id="16" name="Shape 14"/>
+          <p:cNvPr id="23" name="Shape 21"/>
           <p:cNvSpPr/>
           <p:nvPr/>
         </p:nvSpPr>
@@ -9653,7 +9851,7 @@
       </p:sp>
       <p:sp>
         <p:nvSpPr>
-          <p:cNvPr id="17" name="Text 15"/>
+          <p:cNvPr id="24" name="Text 22"/>
           <p:cNvSpPr/>
           <p:nvPr/>
         </p:nvSpPr>
